--- a/youtube_short_20260613.pptx
+++ b/youtube_short_20260613.pptx
@@ -3530,7 +3530,7 @@
                 </a:solidFill>
                 <a:latin typeface="Arial"/>
               </a:rPr>
-              <a:t>自由な住民たちの生活を見守る神ゲー『 トモダチコレクション わくわく生活 』～け…</a:t>
+              <a:t>【自己紹介曲】ぷろふぃ〜る / のんふぃく！【Dance Practice】</a:t>
             </a:r>
           </a:p>
         </p:txBody>
@@ -3565,7 +3565,7 @@
                 </a:solidFill>
                 <a:latin typeface="Arial"/>
               </a:rPr>
-              <a:t>📺 キヨ。</a:t>
+              <a:t>📺 のんふぃく！【Non¬Fiction】</a:t>
             </a:r>
           </a:p>
         </p:txBody>
@@ -3600,7 +3600,7 @@
                 </a:solidFill>
                 <a:latin typeface="Arial"/>
               </a:rPr>
-              <a:t>👁 133万回　👍 4万</a:t>
+              <a:t>👁 16万回　👍 9,226</a:t>
             </a:r>
           </a:p>
         </p:txBody>
@@ -3838,7 +3838,7 @@
                 </a:solidFill>
                 <a:latin typeface="Arial"/>
               </a:rPr>
-              <a:t>是非に及ばず</a:t>
+              <a:t>【#にじシャドバ杯 本番】  徹夜バース 【 くるぜBBB 】</a:t>
             </a:r>
           </a:p>
         </p:txBody>
@@ -3873,7 +3873,7 @@
                 </a:solidFill>
                 <a:latin typeface="Arial"/>
               </a:rPr>
-              <a:t>📺 Nogizaka46 - Topic</a:t>
+              <a:t>📺 Kuzuha Channel</a:t>
             </a:r>
           </a:p>
         </p:txBody>
@@ -3908,7 +3908,7 @@
                 </a:solidFill>
                 <a:latin typeface="Arial"/>
               </a:rPr>
-              <a:t>👁 9万回　👍 2,824</a:t>
+              <a:t>👁 27万回　👍 4,896</a:t>
             </a:r>
           </a:p>
         </p:txBody>
@@ -4146,7 +4146,7 @@
                 </a:solidFill>
                 <a:latin typeface="Arial"/>
               </a:rPr>
-              <a:t>【マインクラフト】モンスターにお金を賭けて1番儲けた人の勝ちです【日常組】</a:t>
+              <a:t>是非に及ばず</a:t>
             </a:r>
           </a:p>
         </p:txBody>
@@ -4181,7 +4181,7 @@
                 </a:solidFill>
                 <a:latin typeface="Arial"/>
               </a:rPr>
-              <a:t>📺 日常組</a:t>
+              <a:t>📺 Nogizaka46 - Topic</a:t>
             </a:r>
           </a:p>
         </p:txBody>
@@ -4216,7 +4216,7 @@
                 </a:solidFill>
                 <a:latin typeface="Arial"/>
               </a:rPr>
-              <a:t>👁 52万回　👍 1万</a:t>
+              <a:t>👁 13万回　👍 3,339</a:t>
             </a:r>
           </a:p>
         </p:txBody>
@@ -4454,7 +4454,7 @@
                 </a:solidFill>
                 <a:latin typeface="Arial"/>
               </a:rPr>
-              <a:t>『FINAL FANTASY VII REVELATION』 1stトレーラー｜…</a:t>
+              <a:t>【#にじシャドバ杯 Day1】にじさんじシャドバ杯2026 リーグ戦</a:t>
             </a:r>
           </a:p>
         </p:txBody>
@@ -4489,7 +4489,7 @@
                 </a:solidFill>
                 <a:latin typeface="Arial"/>
               </a:rPr>
-              <a:t>📺 PlayStation Japan</a:t>
+              <a:t>📺 にじさんじ</a:t>
             </a:r>
           </a:p>
         </p:txBody>
@@ -4524,7 +4524,7 @@
                 </a:solidFill>
                 <a:latin typeface="Arial"/>
               </a:rPr>
-              <a:t>👁 14万回　👍 2,141</a:t>
+              <a:t>👁 56万回　👍 8,031</a:t>
             </a:r>
           </a:p>
         </p:txBody>
@@ -4848,7 +4848,7 @@
                 </a:solidFill>
                 <a:latin typeface="Arial"/>
               </a:rPr>
-              <a:t>【自己紹介曲】ぷろふぃ〜る / のんふぃく！【Dance Practice】</a:t>
+              <a:t>【歌ってみた】おしゃかしゃま/星導ショウ</a:t>
             </a:r>
           </a:p>
         </p:txBody>
@@ -4883,7 +4883,7 @@
                 </a:solidFill>
                 <a:latin typeface="Arial"/>
               </a:rPr>
-              <a:t>📺 のんふぃく！【Non¬Fiction】</a:t>
+              <a:t>📺 星導ショウ / Hoshirube Sho【にじさんじ】</a:t>
             </a:r>
           </a:p>
         </p:txBody>
@@ -4918,7 +4918,7 @@
                 </a:solidFill>
                 <a:latin typeface="Arial"/>
               </a:rPr>
-              <a:t>👁 14万回　👍 8,568</a:t>
+              <a:t>👁 3万回　👍 2万</a:t>
             </a:r>
           </a:p>
         </p:txBody>
